--- a/docs/pptx/auc3/ritu-auc3-linsubhr-ratio-hosp5_10pct.pptx
+++ b/docs/pptx/auc3/ritu-auc3-linsubhr-ratio-hosp5_10pct.pptx
@@ -2443,7 +2443,7 @@
           </p:nvSpPr>
           <p:spPr>
             <a:xfrm>
-              <a:off x="1012387" y="2073503"/>
+              <a:off x="1013326" y="2073503"/>
               <a:ext cx="0" cy="3649639"/>
             </a:xfrm>
             <a:custGeom>
@@ -2486,7 +2486,7 @@
           </p:nvSpPr>
           <p:spPr>
             <a:xfrm>
-              <a:off x="1914572" y="2073503"/>
+              <a:off x="1915271" y="2073503"/>
               <a:ext cx="0" cy="3649639"/>
             </a:xfrm>
             <a:custGeom>
@@ -2529,7 +2529,7 @@
           </p:nvSpPr>
           <p:spPr>
             <a:xfrm>
-              <a:off x="2816756" y="2073503"/>
+              <a:off x="2817216" y="2073503"/>
               <a:ext cx="0" cy="3649639"/>
             </a:xfrm>
             <a:custGeom>
@@ -2572,7 +2572,7 @@
           </p:nvSpPr>
           <p:spPr>
             <a:xfrm>
-              <a:off x="3718941" y="2073503"/>
+              <a:off x="3719160" y="2073503"/>
               <a:ext cx="0" cy="3649639"/>
             </a:xfrm>
             <a:custGeom>
@@ -2615,7 +2615,7 @@
           </p:nvSpPr>
           <p:spPr>
             <a:xfrm>
-              <a:off x="4621125" y="2073503"/>
+              <a:off x="4621105" y="2073503"/>
               <a:ext cx="0" cy="3649639"/>
             </a:xfrm>
             <a:custGeom>
@@ -2658,7 +2658,7 @@
           </p:nvSpPr>
           <p:spPr>
             <a:xfrm>
-              <a:off x="5523310" y="2073503"/>
+              <a:off x="5523050" y="2073503"/>
               <a:ext cx="0" cy="3649639"/>
             </a:xfrm>
             <a:custGeom>
@@ -2701,7 +2701,7 @@
           </p:nvSpPr>
           <p:spPr>
             <a:xfrm>
-              <a:off x="6425495" y="2073503"/>
+              <a:off x="6424995" y="2073503"/>
               <a:ext cx="0" cy="3649639"/>
             </a:xfrm>
             <a:custGeom>
@@ -2744,7 +2744,7 @@
           </p:nvSpPr>
           <p:spPr>
             <a:xfrm>
-              <a:off x="7327679" y="2073503"/>
+              <a:off x="7326940" y="2073503"/>
               <a:ext cx="0" cy="3649639"/>
             </a:xfrm>
             <a:custGeom>
@@ -2787,7 +2787,7 @@
           </p:nvSpPr>
           <p:spPr>
             <a:xfrm>
-              <a:off x="8229864" y="2073503"/>
+              <a:off x="8228885" y="2073503"/>
               <a:ext cx="0" cy="3649639"/>
             </a:xfrm>
             <a:custGeom>
@@ -3045,7 +3045,7 @@
           </p:nvSpPr>
           <p:spPr>
             <a:xfrm>
-              <a:off x="1463479" y="2073503"/>
+              <a:off x="1464298" y="2073503"/>
               <a:ext cx="0" cy="3649639"/>
             </a:xfrm>
             <a:custGeom>
@@ -3088,7 +3088,7 @@
           </p:nvSpPr>
           <p:spPr>
             <a:xfrm>
-              <a:off x="2365664" y="2073503"/>
+              <a:off x="2366243" y="2073503"/>
               <a:ext cx="0" cy="3649639"/>
             </a:xfrm>
             <a:custGeom>
@@ -3131,7 +3131,7 @@
           </p:nvSpPr>
           <p:spPr>
             <a:xfrm>
-              <a:off x="3267849" y="2073503"/>
+              <a:off x="3268188" y="2073503"/>
               <a:ext cx="0" cy="3649639"/>
             </a:xfrm>
             <a:custGeom>
@@ -3174,7 +3174,7 @@
           </p:nvSpPr>
           <p:spPr>
             <a:xfrm>
-              <a:off x="4170033" y="2073503"/>
+              <a:off x="4170133" y="2073503"/>
               <a:ext cx="0" cy="3649639"/>
             </a:xfrm>
             <a:custGeom>
@@ -3217,7 +3217,7 @@
           </p:nvSpPr>
           <p:spPr>
             <a:xfrm>
-              <a:off x="5072218" y="2073503"/>
+              <a:off x="5072078" y="2073503"/>
               <a:ext cx="0" cy="3649639"/>
             </a:xfrm>
             <a:custGeom>
@@ -3260,7 +3260,7 @@
           </p:nvSpPr>
           <p:spPr>
             <a:xfrm>
-              <a:off x="5974402" y="2073503"/>
+              <a:off x="5974022" y="2073503"/>
               <a:ext cx="0" cy="3649639"/>
             </a:xfrm>
             <a:custGeom>
@@ -3303,7 +3303,7 @@
           </p:nvSpPr>
           <p:spPr>
             <a:xfrm>
-              <a:off x="6876587" y="2073503"/>
+              <a:off x="6875967" y="2073503"/>
               <a:ext cx="0" cy="3649639"/>
             </a:xfrm>
             <a:custGeom>
@@ -3346,7 +3346,7 @@
           </p:nvSpPr>
           <p:spPr>
             <a:xfrm>
-              <a:off x="7778772" y="2073503"/>
+              <a:off x="7777912" y="2073503"/>
               <a:ext cx="0" cy="3649639"/>
             </a:xfrm>
             <a:custGeom>
@@ -3389,441 +3389,441 @@
           </p:nvSpPr>
           <p:spPr>
             <a:xfrm>
-              <a:off x="2839383" y="2073503"/>
-              <a:ext cx="5423296" cy="3483714"/>
+              <a:off x="2842429" y="2073503"/>
+              <a:ext cx="5420250" cy="3483715"/>
             </a:xfrm>
             <a:custGeom>
               <a:avLst/>
               <a:pathLst>
-                <a:path w="5423296" h="3483714">
+                <a:path w="5420250" h="3483715">
                   <a:moveTo>
-                    <a:pt x="747207" y="0"/>
+                    <a:pt x="751477" y="0"/>
                   </a:moveTo>
                   <a:lnTo>
-                    <a:pt x="767832" y="184340"/>
-                  </a:lnTo>
-                  <a:lnTo>
-                    <a:pt x="839454" y="720463"/>
-                  </a:lnTo>
-                  <a:lnTo>
-                    <a:pt x="911077" y="1169471"/>
-                  </a:lnTo>
-                  <a:lnTo>
-                    <a:pt x="982699" y="1545520"/>
-                  </a:lnTo>
-                  <a:lnTo>
-                    <a:pt x="1054322" y="1860464"/>
-                  </a:lnTo>
-                  <a:lnTo>
-                    <a:pt x="1125944" y="2124232"/>
-                  </a:lnTo>
-                  <a:lnTo>
-                    <a:pt x="1197567" y="2345141"/>
-                  </a:lnTo>
-                  <a:lnTo>
-                    <a:pt x="1269189" y="2530154"/>
-                  </a:lnTo>
-                  <a:lnTo>
-                    <a:pt x="1340812" y="2667899"/>
-                  </a:lnTo>
-                  <a:lnTo>
-                    <a:pt x="1412434" y="2728747"/>
-                  </a:lnTo>
-                  <a:lnTo>
-                    <a:pt x="1484057" y="2785057"/>
-                  </a:lnTo>
-                  <a:lnTo>
-                    <a:pt x="1555679" y="2837167"/>
-                  </a:lnTo>
-                  <a:lnTo>
-                    <a:pt x="1627302" y="2885391"/>
-                  </a:lnTo>
-                  <a:lnTo>
-                    <a:pt x="1698925" y="2930018"/>
-                  </a:lnTo>
-                  <a:lnTo>
-                    <a:pt x="1770547" y="2971316"/>
-                  </a:lnTo>
-                  <a:lnTo>
-                    <a:pt x="1842170" y="3009535"/>
-                  </a:lnTo>
-                  <a:lnTo>
-                    <a:pt x="1913792" y="3044903"/>
-                  </a:lnTo>
-                  <a:lnTo>
-                    <a:pt x="1985415" y="3077633"/>
-                  </a:lnTo>
-                  <a:lnTo>
-                    <a:pt x="2057037" y="3107922"/>
-                  </a:lnTo>
-                  <a:lnTo>
-                    <a:pt x="2128660" y="3135952"/>
-                  </a:lnTo>
-                  <a:lnTo>
-                    <a:pt x="2200282" y="3161891"/>
-                  </a:lnTo>
-                  <a:lnTo>
-                    <a:pt x="2271905" y="3185896"/>
-                  </a:lnTo>
-                  <a:lnTo>
-                    <a:pt x="2343527" y="3208111"/>
-                  </a:lnTo>
-                  <a:lnTo>
-                    <a:pt x="2415150" y="3228668"/>
-                  </a:lnTo>
-                  <a:lnTo>
-                    <a:pt x="2486772" y="3247693"/>
-                  </a:lnTo>
-                  <a:lnTo>
-                    <a:pt x="2558395" y="3265298"/>
-                  </a:lnTo>
-                  <a:lnTo>
-                    <a:pt x="2630017" y="3281591"/>
-                  </a:lnTo>
-                  <a:lnTo>
-                    <a:pt x="2701640" y="3296668"/>
-                  </a:lnTo>
-                  <a:lnTo>
-                    <a:pt x="2773262" y="3310621"/>
-                  </a:lnTo>
-                  <a:lnTo>
-                    <a:pt x="2844885" y="3323533"/>
-                  </a:lnTo>
-                  <a:lnTo>
-                    <a:pt x="2916507" y="3335482"/>
-                  </a:lnTo>
-                  <a:lnTo>
-                    <a:pt x="2988130" y="3346540"/>
-                  </a:lnTo>
-                  <a:lnTo>
-                    <a:pt x="3059753" y="3356773"/>
-                  </a:lnTo>
-                  <a:lnTo>
-                    <a:pt x="3131375" y="3366243"/>
-                  </a:lnTo>
-                  <a:lnTo>
-                    <a:pt x="3202998" y="3375007"/>
-                  </a:lnTo>
-                  <a:lnTo>
-                    <a:pt x="3274620" y="3383117"/>
-                  </a:lnTo>
-                  <a:lnTo>
-                    <a:pt x="3346243" y="3390622"/>
-                  </a:lnTo>
-                  <a:lnTo>
-                    <a:pt x="3417865" y="3397568"/>
-                  </a:lnTo>
-                  <a:lnTo>
-                    <a:pt x="3489488" y="3403995"/>
-                  </a:lnTo>
-                  <a:lnTo>
-                    <a:pt x="3561110" y="3409943"/>
-                  </a:lnTo>
-                  <a:lnTo>
-                    <a:pt x="3632733" y="3415448"/>
-                  </a:lnTo>
-                  <a:lnTo>
-                    <a:pt x="3704355" y="3420542"/>
-                  </a:lnTo>
-                  <a:lnTo>
-                    <a:pt x="3775978" y="3425256"/>
-                  </a:lnTo>
-                  <a:lnTo>
-                    <a:pt x="3847600" y="3429618"/>
-                  </a:lnTo>
-                  <a:lnTo>
-                    <a:pt x="3919223" y="3433655"/>
-                  </a:lnTo>
-                  <a:lnTo>
-                    <a:pt x="3990845" y="3437391"/>
-                  </a:lnTo>
-                  <a:lnTo>
-                    <a:pt x="4062468" y="3440848"/>
-                  </a:lnTo>
-                  <a:lnTo>
-                    <a:pt x="4134090" y="3444048"/>
-                  </a:lnTo>
-                  <a:lnTo>
-                    <a:pt x="4205713" y="3447009"/>
-                  </a:lnTo>
-                  <a:lnTo>
-                    <a:pt x="4277335" y="3449749"/>
-                  </a:lnTo>
-                  <a:lnTo>
-                    <a:pt x="4348958" y="3452284"/>
-                  </a:lnTo>
-                  <a:lnTo>
-                    <a:pt x="4420581" y="3454631"/>
-                  </a:lnTo>
-                  <a:lnTo>
-                    <a:pt x="4492203" y="3456802"/>
-                  </a:lnTo>
-                  <a:lnTo>
-                    <a:pt x="4563826" y="3458812"/>
-                  </a:lnTo>
-                  <a:lnTo>
-                    <a:pt x="4635448" y="3460672"/>
-                  </a:lnTo>
-                  <a:lnTo>
-                    <a:pt x="4707071" y="3462393"/>
-                  </a:lnTo>
-                  <a:lnTo>
-                    <a:pt x="4778693" y="3463985"/>
-                  </a:lnTo>
-                  <a:lnTo>
-                    <a:pt x="4850316" y="3465459"/>
-                  </a:lnTo>
-                  <a:lnTo>
-                    <a:pt x="4921938" y="3466823"/>
-                  </a:lnTo>
-                  <a:lnTo>
-                    <a:pt x="4993561" y="3468085"/>
-                  </a:lnTo>
-                  <a:lnTo>
-                    <a:pt x="5065183" y="3469253"/>
-                  </a:lnTo>
-                  <a:lnTo>
-                    <a:pt x="5136806" y="3470334"/>
-                  </a:lnTo>
-                  <a:lnTo>
-                    <a:pt x="5208428" y="3471334"/>
-                  </a:lnTo>
-                  <a:lnTo>
-                    <a:pt x="5280051" y="3472260"/>
-                  </a:lnTo>
-                  <a:lnTo>
-                    <a:pt x="5351673" y="3473117"/>
-                  </a:lnTo>
-                  <a:lnTo>
-                    <a:pt x="5423296" y="3473910"/>
-                  </a:lnTo>
-                  <a:lnTo>
-                    <a:pt x="5423296" y="3483714"/>
-                  </a:lnTo>
-                  <a:lnTo>
-                    <a:pt x="5351673" y="3483708"/>
-                  </a:lnTo>
-                  <a:lnTo>
-                    <a:pt x="5280051" y="3483700"/>
-                  </a:lnTo>
-                  <a:lnTo>
-                    <a:pt x="5208428" y="3483691"/>
-                  </a:lnTo>
-                  <a:lnTo>
-                    <a:pt x="5136806" y="3483680"/>
-                  </a:lnTo>
-                  <a:lnTo>
-                    <a:pt x="5065183" y="3483667"/>
-                  </a:lnTo>
-                  <a:lnTo>
-                    <a:pt x="4993561" y="3483652"/>
-                  </a:lnTo>
-                  <a:lnTo>
-                    <a:pt x="4921938" y="3483634"/>
-                  </a:lnTo>
-                  <a:lnTo>
-                    <a:pt x="4850316" y="3483612"/>
-                  </a:lnTo>
-                  <a:lnTo>
-                    <a:pt x="4778693" y="3483586"/>
-                  </a:lnTo>
-                  <a:lnTo>
-                    <a:pt x="4707071" y="3483555"/>
-                  </a:lnTo>
-                  <a:lnTo>
-                    <a:pt x="4635448" y="3483517"/>
-                  </a:lnTo>
-                  <a:lnTo>
-                    <a:pt x="4563826" y="3483473"/>
-                  </a:lnTo>
-                  <a:lnTo>
-                    <a:pt x="4492203" y="3483420"/>
-                  </a:lnTo>
-                  <a:lnTo>
-                    <a:pt x="4420581" y="3483357"/>
-                  </a:lnTo>
-                  <a:lnTo>
-                    <a:pt x="4348958" y="3483281"/>
-                  </a:lnTo>
-                  <a:lnTo>
-                    <a:pt x="4277335" y="3483191"/>
-                  </a:lnTo>
-                  <a:lnTo>
-                    <a:pt x="4205713" y="3483083"/>
-                  </a:lnTo>
-                  <a:lnTo>
-                    <a:pt x="4134090" y="3482954"/>
-                  </a:lnTo>
-                  <a:lnTo>
-                    <a:pt x="4062468" y="3482800"/>
-                  </a:lnTo>
-                  <a:lnTo>
-                    <a:pt x="3990845" y="3482617"/>
-                  </a:lnTo>
-                  <a:lnTo>
-                    <a:pt x="3919223" y="3482398"/>
-                  </a:lnTo>
-                  <a:lnTo>
-                    <a:pt x="3847600" y="3482136"/>
-                  </a:lnTo>
-                  <a:lnTo>
-                    <a:pt x="3775978" y="3481823"/>
-                  </a:lnTo>
-                  <a:lnTo>
-                    <a:pt x="3704355" y="3481450"/>
-                  </a:lnTo>
-                  <a:lnTo>
-                    <a:pt x="3632733" y="3481005"/>
-                  </a:lnTo>
-                  <a:lnTo>
-                    <a:pt x="3561110" y="3480473"/>
-                  </a:lnTo>
-                  <a:lnTo>
-                    <a:pt x="3489488" y="3479838"/>
-                  </a:lnTo>
-                  <a:lnTo>
-                    <a:pt x="3417865" y="3479079"/>
-                  </a:lnTo>
-                  <a:lnTo>
-                    <a:pt x="3346243" y="3478174"/>
-                  </a:lnTo>
-                  <a:lnTo>
-                    <a:pt x="3274620" y="3477093"/>
-                  </a:lnTo>
-                  <a:lnTo>
-                    <a:pt x="3202998" y="3475802"/>
-                  </a:lnTo>
-                  <a:lnTo>
-                    <a:pt x="3131375" y="3474260"/>
-                  </a:lnTo>
-                  <a:lnTo>
-                    <a:pt x="3059753" y="3472420"/>
-                  </a:lnTo>
-                  <a:lnTo>
-                    <a:pt x="2988130" y="3470222"/>
-                  </a:lnTo>
-                  <a:lnTo>
-                    <a:pt x="2916507" y="3467598"/>
-                  </a:lnTo>
-                  <a:lnTo>
-                    <a:pt x="2844885" y="3464465"/>
-                  </a:lnTo>
-                  <a:lnTo>
-                    <a:pt x="2773262" y="3460724"/>
-                  </a:lnTo>
-                  <a:lnTo>
-                    <a:pt x="2701640" y="3456258"/>
-                  </a:lnTo>
-                  <a:lnTo>
-                    <a:pt x="2630017" y="3450924"/>
-                  </a:lnTo>
-                  <a:lnTo>
-                    <a:pt x="2558395" y="3444556"/>
-                  </a:lnTo>
-                  <a:lnTo>
-                    <a:pt x="2486772" y="3436953"/>
-                  </a:lnTo>
-                  <a:lnTo>
-                    <a:pt x="2415150" y="3427874"/>
-                  </a:lnTo>
-                  <a:lnTo>
-                    <a:pt x="2343527" y="3417034"/>
-                  </a:lnTo>
-                  <a:lnTo>
-                    <a:pt x="2271905" y="3404091"/>
-                  </a:lnTo>
-                  <a:lnTo>
-                    <a:pt x="2200282" y="3388636"/>
-                  </a:lnTo>
-                  <a:lnTo>
-                    <a:pt x="2128660" y="3370183"/>
-                  </a:lnTo>
-                  <a:lnTo>
-                    <a:pt x="2057037" y="3348150"/>
-                  </a:lnTo>
-                  <a:lnTo>
-                    <a:pt x="1985415" y="3321842"/>
-                  </a:lnTo>
-                  <a:lnTo>
-                    <a:pt x="1913792" y="3290430"/>
-                  </a:lnTo>
-                  <a:lnTo>
-                    <a:pt x="1842170" y="3252923"/>
-                  </a:lnTo>
-                  <a:lnTo>
-                    <a:pt x="1770547" y="3208140"/>
-                  </a:lnTo>
-                  <a:lnTo>
-                    <a:pt x="1698925" y="3154667"/>
-                  </a:lnTo>
-                  <a:lnTo>
-                    <a:pt x="1627302" y="3090820"/>
-                  </a:lnTo>
-                  <a:lnTo>
-                    <a:pt x="1555679" y="3014586"/>
-                  </a:lnTo>
-                  <a:lnTo>
-                    <a:pt x="1484057" y="2923561"/>
-                  </a:lnTo>
-                  <a:lnTo>
-                    <a:pt x="1412434" y="2814876"/>
-                  </a:lnTo>
-                  <a:lnTo>
-                    <a:pt x="1340812" y="2685104"/>
-                  </a:lnTo>
-                  <a:lnTo>
-                    <a:pt x="1269189" y="2602147"/>
-                  </a:lnTo>
-                  <a:lnTo>
-                    <a:pt x="1197567" y="2531096"/>
-                  </a:lnTo>
-                  <a:lnTo>
-                    <a:pt x="1125944" y="2454318"/>
-                  </a:lnTo>
-                  <a:lnTo>
-                    <a:pt x="1054322" y="2371353"/>
-                  </a:lnTo>
-                  <a:lnTo>
-                    <a:pt x="982699" y="2281701"/>
-                  </a:lnTo>
-                  <a:lnTo>
-                    <a:pt x="911077" y="2184824"/>
-                  </a:lnTo>
-                  <a:lnTo>
-                    <a:pt x="839454" y="2080139"/>
-                  </a:lnTo>
-                  <a:lnTo>
-                    <a:pt x="767832" y="1967017"/>
-                  </a:lnTo>
-                  <a:lnTo>
-                    <a:pt x="696209" y="1844779"/>
-                  </a:lnTo>
-                  <a:lnTo>
-                    <a:pt x="624587" y="1712688"/>
-                  </a:lnTo>
-                  <a:lnTo>
-                    <a:pt x="552964" y="1569953"/>
-                  </a:lnTo>
-                  <a:lnTo>
-                    <a:pt x="481342" y="1415713"/>
-                  </a:lnTo>
-                  <a:lnTo>
-                    <a:pt x="409719" y="1249043"/>
-                  </a:lnTo>
-                  <a:lnTo>
-                    <a:pt x="338097" y="1068940"/>
-                  </a:lnTo>
-                  <a:lnTo>
-                    <a:pt x="266474" y="874322"/>
-                  </a:lnTo>
-                  <a:lnTo>
-                    <a:pt x="194851" y="664019"/>
-                  </a:lnTo>
-                  <a:lnTo>
-                    <a:pt x="123229" y="436768"/>
-                  </a:lnTo>
-                  <a:lnTo>
-                    <a:pt x="51606" y="191201"/>
+                    <a:pt x="764786" y="121748"/>
+                  </a:lnTo>
+                  <a:lnTo>
+                    <a:pt x="836408" y="670099"/>
+                  </a:lnTo>
+                  <a:lnTo>
+                    <a:pt x="908031" y="1129012"/>
+                  </a:lnTo>
+                  <a:lnTo>
+                    <a:pt x="979653" y="1513076"/>
+                  </a:lnTo>
+                  <a:lnTo>
+                    <a:pt x="1051276" y="1834498"/>
+                  </a:lnTo>
+                  <a:lnTo>
+                    <a:pt x="1122898" y="2103495"/>
+                  </a:lnTo>
+                  <a:lnTo>
+                    <a:pt x="1194521" y="2328617"/>
+                  </a:lnTo>
+                  <a:lnTo>
+                    <a:pt x="1266143" y="2517022"/>
+                  </a:lnTo>
+                  <a:lnTo>
+                    <a:pt x="1337766" y="2663217"/>
+                  </a:lnTo>
+                  <a:lnTo>
+                    <a:pt x="1409388" y="2724314"/>
+                  </a:lnTo>
+                  <a:lnTo>
+                    <a:pt x="1481011" y="2780861"/>
+                  </a:lnTo>
+                  <a:lnTo>
+                    <a:pt x="1552633" y="2833198"/>
+                  </a:lnTo>
+                  <a:lnTo>
+                    <a:pt x="1624256" y="2881638"/>
+                  </a:lnTo>
+                  <a:lnTo>
+                    <a:pt x="1695879" y="2926471"/>
+                  </a:lnTo>
+                  <a:lnTo>
+                    <a:pt x="1767501" y="2967966"/>
+                  </a:lnTo>
+                  <a:lnTo>
+                    <a:pt x="1839124" y="3006371"/>
+                  </a:lnTo>
+                  <a:lnTo>
+                    <a:pt x="1910746" y="3041916"/>
+                  </a:lnTo>
+                  <a:lnTo>
+                    <a:pt x="1982369" y="3074815"/>
+                  </a:lnTo>
+                  <a:lnTo>
+                    <a:pt x="2053991" y="3105264"/>
+                  </a:lnTo>
+                  <a:lnTo>
+                    <a:pt x="2125614" y="3133446"/>
+                  </a:lnTo>
+                  <a:lnTo>
+                    <a:pt x="2197236" y="3159529"/>
+                  </a:lnTo>
+                  <a:lnTo>
+                    <a:pt x="2268859" y="3183670"/>
+                  </a:lnTo>
+                  <a:lnTo>
+                    <a:pt x="2340481" y="3206014"/>
+                  </a:lnTo>
+                  <a:lnTo>
+                    <a:pt x="2412104" y="3226694"/>
+                  </a:lnTo>
+                  <a:lnTo>
+                    <a:pt x="2483726" y="3245834"/>
+                  </a:lnTo>
+                  <a:lnTo>
+                    <a:pt x="2555349" y="3263549"/>
+                  </a:lnTo>
+                  <a:lnTo>
+                    <a:pt x="2626971" y="3279945"/>
+                  </a:lnTo>
+                  <a:lnTo>
+                    <a:pt x="2698594" y="3295120"/>
+                  </a:lnTo>
+                  <a:lnTo>
+                    <a:pt x="2770216" y="3309165"/>
+                  </a:lnTo>
+                  <a:lnTo>
+                    <a:pt x="2841839" y="3322164"/>
+                  </a:lnTo>
+                  <a:lnTo>
+                    <a:pt x="2913461" y="3334196"/>
+                  </a:lnTo>
+                  <a:lnTo>
+                    <a:pt x="2985084" y="3345331"/>
+                  </a:lnTo>
+                  <a:lnTo>
+                    <a:pt x="3056707" y="3355638"/>
+                  </a:lnTo>
+                  <a:lnTo>
+                    <a:pt x="3128329" y="3365177"/>
+                  </a:lnTo>
+                  <a:lnTo>
+                    <a:pt x="3199952" y="3374005"/>
+                  </a:lnTo>
+                  <a:lnTo>
+                    <a:pt x="3271574" y="3382177"/>
+                  </a:lnTo>
+                  <a:lnTo>
+                    <a:pt x="3343197" y="3389740"/>
+                  </a:lnTo>
+                  <a:lnTo>
+                    <a:pt x="3414819" y="3396739"/>
+                  </a:lnTo>
+                  <a:lnTo>
+                    <a:pt x="3486442" y="3403218"/>
+                  </a:lnTo>
+                  <a:lnTo>
+                    <a:pt x="3558064" y="3409214"/>
+                  </a:lnTo>
+                  <a:lnTo>
+                    <a:pt x="3629687" y="3414764"/>
+                  </a:lnTo>
+                  <a:lnTo>
+                    <a:pt x="3701309" y="3419900"/>
+                  </a:lnTo>
+                  <a:lnTo>
+                    <a:pt x="3772932" y="3424654"/>
+                  </a:lnTo>
+                  <a:lnTo>
+                    <a:pt x="3844554" y="3429054"/>
+                  </a:lnTo>
+                  <a:lnTo>
+                    <a:pt x="3916177" y="3433127"/>
+                  </a:lnTo>
+                  <a:lnTo>
+                    <a:pt x="3987799" y="3436896"/>
+                  </a:lnTo>
+                  <a:lnTo>
+                    <a:pt x="4059422" y="3440384"/>
+                  </a:lnTo>
+                  <a:lnTo>
+                    <a:pt x="4131044" y="3443613"/>
+                  </a:lnTo>
+                  <a:lnTo>
+                    <a:pt x="4202667" y="3446601"/>
+                  </a:lnTo>
+                  <a:lnTo>
+                    <a:pt x="4274289" y="3449367"/>
+                  </a:lnTo>
+                  <a:lnTo>
+                    <a:pt x="4345912" y="3451927"/>
+                  </a:lnTo>
+                  <a:lnTo>
+                    <a:pt x="4417535" y="3454296"/>
+                  </a:lnTo>
+                  <a:lnTo>
+                    <a:pt x="4489157" y="3456489"/>
+                  </a:lnTo>
+                  <a:lnTo>
+                    <a:pt x="4560780" y="3458519"/>
+                  </a:lnTo>
+                  <a:lnTo>
+                    <a:pt x="4632402" y="3460397"/>
+                  </a:lnTo>
+                  <a:lnTo>
+                    <a:pt x="4704025" y="3462136"/>
+                  </a:lnTo>
+                  <a:lnTo>
+                    <a:pt x="4775647" y="3463745"/>
+                  </a:lnTo>
+                  <a:lnTo>
+                    <a:pt x="4847270" y="3465234"/>
+                  </a:lnTo>
+                  <a:lnTo>
+                    <a:pt x="4918892" y="3466613"/>
+                  </a:lnTo>
+                  <a:lnTo>
+                    <a:pt x="4990515" y="3467888"/>
+                  </a:lnTo>
+                  <a:lnTo>
+                    <a:pt x="5062137" y="3469069"/>
+                  </a:lnTo>
+                  <a:lnTo>
+                    <a:pt x="5133760" y="3470162"/>
+                  </a:lnTo>
+                  <a:lnTo>
+                    <a:pt x="5205382" y="3471174"/>
+                  </a:lnTo>
+                  <a:lnTo>
+                    <a:pt x="5277005" y="3472110"/>
+                  </a:lnTo>
+                  <a:lnTo>
+                    <a:pt x="5348627" y="3472976"/>
+                  </a:lnTo>
+                  <a:lnTo>
+                    <a:pt x="5420250" y="3473778"/>
+                  </a:lnTo>
+                  <a:lnTo>
+                    <a:pt x="5420250" y="3483715"/>
+                  </a:lnTo>
+                  <a:lnTo>
+                    <a:pt x="5348627" y="3483709"/>
+                  </a:lnTo>
+                  <a:lnTo>
+                    <a:pt x="5277005" y="3483701"/>
+                  </a:lnTo>
+                  <a:lnTo>
+                    <a:pt x="5205382" y="3483692"/>
+                  </a:lnTo>
+                  <a:lnTo>
+                    <a:pt x="5133760" y="3483682"/>
+                  </a:lnTo>
+                  <a:lnTo>
+                    <a:pt x="5062137" y="3483669"/>
+                  </a:lnTo>
+                  <a:lnTo>
+                    <a:pt x="4990515" y="3483654"/>
+                  </a:lnTo>
+                  <a:lnTo>
+                    <a:pt x="4918892" y="3483636"/>
+                  </a:lnTo>
+                  <a:lnTo>
+                    <a:pt x="4847270" y="3483615"/>
+                  </a:lnTo>
+                  <a:lnTo>
+                    <a:pt x="4775647" y="3483589"/>
+                  </a:lnTo>
+                  <a:lnTo>
+                    <a:pt x="4704025" y="3483559"/>
+                  </a:lnTo>
+                  <a:lnTo>
+                    <a:pt x="4632402" y="3483522"/>
+                  </a:lnTo>
+                  <a:lnTo>
+                    <a:pt x="4560780" y="3483478"/>
+                  </a:lnTo>
+                  <a:lnTo>
+                    <a:pt x="4489157" y="3483426"/>
+                  </a:lnTo>
+                  <a:lnTo>
+                    <a:pt x="4417535" y="3483364"/>
+                  </a:lnTo>
+                  <a:lnTo>
+                    <a:pt x="4345912" y="3483289"/>
+                  </a:lnTo>
+                  <a:lnTo>
+                    <a:pt x="4274289" y="3483200"/>
+                  </a:lnTo>
+                  <a:lnTo>
+                    <a:pt x="4202667" y="3483093"/>
+                  </a:lnTo>
+                  <a:lnTo>
+                    <a:pt x="4131044" y="3482966"/>
+                  </a:lnTo>
+                  <a:lnTo>
+                    <a:pt x="4059422" y="3482814"/>
+                  </a:lnTo>
+                  <a:lnTo>
+                    <a:pt x="3987799" y="3482633"/>
+                  </a:lnTo>
+                  <a:lnTo>
+                    <a:pt x="3916177" y="3482415"/>
+                  </a:lnTo>
+                  <a:lnTo>
+                    <a:pt x="3844554" y="3482156"/>
+                  </a:lnTo>
+                  <a:lnTo>
+                    <a:pt x="3772932" y="3481846"/>
+                  </a:lnTo>
+                  <a:lnTo>
+                    <a:pt x="3701309" y="3481476"/>
+                  </a:lnTo>
+                  <a:lnTo>
+                    <a:pt x="3629687" y="3481033"/>
+                  </a:lnTo>
+                  <a:lnTo>
+                    <a:pt x="3558064" y="3480504"/>
+                  </a:lnTo>
+                  <a:lnTo>
+                    <a:pt x="3486442" y="3479873"/>
+                  </a:lnTo>
+                  <a:lnTo>
+                    <a:pt x="3414819" y="3479118"/>
+                  </a:lnTo>
+                  <a:lnTo>
+                    <a:pt x="3343197" y="3478216"/>
+                  </a:lnTo>
+                  <a:lnTo>
+                    <a:pt x="3271574" y="3477138"/>
+                  </a:lnTo>
+                  <a:lnTo>
+                    <a:pt x="3199952" y="3475850"/>
+                  </a:lnTo>
+                  <a:lnTo>
+                    <a:pt x="3128329" y="3474311"/>
+                  </a:lnTo>
+                  <a:lnTo>
+                    <a:pt x="3056707" y="3472472"/>
+                  </a:lnTo>
+                  <a:lnTo>
+                    <a:pt x="2985084" y="3470274"/>
+                  </a:lnTo>
+                  <a:lnTo>
+                    <a:pt x="2913461" y="3467649"/>
+                  </a:lnTo>
+                  <a:lnTo>
+                    <a:pt x="2841839" y="3464512"/>
+                  </a:lnTo>
+                  <a:lnTo>
+                    <a:pt x="2770216" y="3460763"/>
+                  </a:lnTo>
+                  <a:lnTo>
+                    <a:pt x="2698594" y="3456284"/>
+                  </a:lnTo>
+                  <a:lnTo>
+                    <a:pt x="2626971" y="3450931"/>
+                  </a:lnTo>
+                  <a:lnTo>
+                    <a:pt x="2555349" y="3444536"/>
+                  </a:lnTo>
+                  <a:lnTo>
+                    <a:pt x="2483726" y="3436894"/>
+                  </a:lnTo>
+                  <a:lnTo>
+                    <a:pt x="2412104" y="3427763"/>
+                  </a:lnTo>
+                  <a:lnTo>
+                    <a:pt x="2340481" y="3416853"/>
+                  </a:lnTo>
+                  <a:lnTo>
+                    <a:pt x="2268859" y="3403816"/>
+                  </a:lnTo>
+                  <a:lnTo>
+                    <a:pt x="2197236" y="3388238"/>
+                  </a:lnTo>
+                  <a:lnTo>
+                    <a:pt x="2125614" y="3369625"/>
+                  </a:lnTo>
+                  <a:lnTo>
+                    <a:pt x="2053991" y="3347383"/>
+                  </a:lnTo>
+                  <a:lnTo>
+                    <a:pt x="1982369" y="3320808"/>
+                  </a:lnTo>
+                  <a:lnTo>
+                    <a:pt x="1910746" y="3289053"/>
+                  </a:lnTo>
+                  <a:lnTo>
+                    <a:pt x="1839124" y="3251109"/>
+                  </a:lnTo>
+                  <a:lnTo>
+                    <a:pt x="1767501" y="3205770"/>
+                  </a:lnTo>
+                  <a:lnTo>
+                    <a:pt x="1695879" y="3151595"/>
+                  </a:lnTo>
+                  <a:lnTo>
+                    <a:pt x="1624256" y="3086863"/>
+                  </a:lnTo>
+                  <a:lnTo>
+                    <a:pt x="1552633" y="3009514"/>
+                  </a:lnTo>
+                  <a:lnTo>
+                    <a:pt x="1481011" y="2917091"/>
+                  </a:lnTo>
+                  <a:lnTo>
+                    <a:pt x="1409388" y="2806656"/>
+                  </a:lnTo>
+                  <a:lnTo>
+                    <a:pt x="1337766" y="2674698"/>
+                  </a:lnTo>
+                  <a:lnTo>
+                    <a:pt x="1266143" y="2597205"/>
+                  </a:lnTo>
+                  <a:lnTo>
+                    <a:pt x="1194521" y="2525883"/>
+                  </a:lnTo>
+                  <a:lnTo>
+                    <a:pt x="1122898" y="2448822"/>
+                  </a:lnTo>
+                  <a:lnTo>
+                    <a:pt x="1051276" y="2365562"/>
+                  </a:lnTo>
+                  <a:lnTo>
+                    <a:pt x="979653" y="2275604"/>
+                  </a:lnTo>
+                  <a:lnTo>
+                    <a:pt x="908031" y="2178408"/>
+                  </a:lnTo>
+                  <a:lnTo>
+                    <a:pt x="836408" y="2073393"/>
+                  </a:lnTo>
+                  <a:lnTo>
+                    <a:pt x="764786" y="1959930"/>
+                  </a:lnTo>
+                  <a:lnTo>
+                    <a:pt x="693163" y="1837338"/>
+                  </a:lnTo>
+                  <a:lnTo>
+                    <a:pt x="621541" y="1704884"/>
+                  </a:lnTo>
+                  <a:lnTo>
+                    <a:pt x="549918" y="1561774"/>
+                  </a:lnTo>
+                  <a:lnTo>
+                    <a:pt x="478296" y="1407151"/>
+                  </a:lnTo>
+                  <a:lnTo>
+                    <a:pt x="406673" y="1240088"/>
+                  </a:lnTo>
+                  <a:lnTo>
+                    <a:pt x="335051" y="1059584"/>
+                  </a:lnTo>
+                  <a:lnTo>
+                    <a:pt x="263428" y="864560"/>
+                  </a:lnTo>
+                  <a:lnTo>
+                    <a:pt x="191805" y="653845"/>
+                  </a:lnTo>
+                  <a:lnTo>
+                    <a:pt x="120183" y="426178"/>
+                  </a:lnTo>
+                  <a:lnTo>
+                    <a:pt x="48560" y="180196"/>
                   </a:lnTo>
                   <a:lnTo>
                     <a:pt x="0" y="0"/>
@@ -3852,213 +3852,213 @@
           </p:nvSpPr>
           <p:spPr>
             <a:xfrm>
-              <a:off x="3586590" y="2073503"/>
-              <a:ext cx="4676089" cy="3473910"/>
+              <a:off x="3593906" y="2073503"/>
+              <a:ext cx="4668772" cy="3473778"/>
             </a:xfrm>
             <a:custGeom>
               <a:avLst/>
               <a:pathLst>
-                <a:path w="4676089" h="3473910">
+                <a:path w="4668772" h="3473778">
                   <a:moveTo>
                     <a:pt x="0" y="0"/>
                   </a:moveTo>
                   <a:lnTo>
-                    <a:pt x="20625" y="184340"/>
-                  </a:lnTo>
-                  <a:lnTo>
-                    <a:pt x="92247" y="720463"/>
-                  </a:lnTo>
-                  <a:lnTo>
-                    <a:pt x="163870" y="1169471"/>
-                  </a:lnTo>
-                  <a:lnTo>
-                    <a:pt x="235492" y="1545520"/>
-                  </a:lnTo>
-                  <a:lnTo>
-                    <a:pt x="307115" y="1860464"/>
-                  </a:lnTo>
-                  <a:lnTo>
-                    <a:pt x="378737" y="2124232"/>
-                  </a:lnTo>
-                  <a:lnTo>
-                    <a:pt x="450360" y="2345141"/>
-                  </a:lnTo>
-                  <a:lnTo>
-                    <a:pt x="521982" y="2530154"/>
-                  </a:lnTo>
-                  <a:lnTo>
-                    <a:pt x="593605" y="2667899"/>
-                  </a:lnTo>
-                  <a:lnTo>
-                    <a:pt x="665227" y="2728747"/>
-                  </a:lnTo>
-                  <a:lnTo>
-                    <a:pt x="736850" y="2785057"/>
-                  </a:lnTo>
-                  <a:lnTo>
-                    <a:pt x="808472" y="2837167"/>
-                  </a:lnTo>
-                  <a:lnTo>
-                    <a:pt x="880095" y="2885391"/>
-                  </a:lnTo>
-                  <a:lnTo>
-                    <a:pt x="951717" y="2930018"/>
-                  </a:lnTo>
-                  <a:lnTo>
-                    <a:pt x="1023340" y="2971316"/>
-                  </a:lnTo>
-                  <a:lnTo>
-                    <a:pt x="1094962" y="3009535"/>
-                  </a:lnTo>
-                  <a:lnTo>
-                    <a:pt x="1166585" y="3044903"/>
-                  </a:lnTo>
-                  <a:lnTo>
-                    <a:pt x="1238208" y="3077633"/>
-                  </a:lnTo>
-                  <a:lnTo>
-                    <a:pt x="1309830" y="3107922"/>
-                  </a:lnTo>
-                  <a:lnTo>
-                    <a:pt x="1381453" y="3135952"/>
-                  </a:lnTo>
-                  <a:lnTo>
-                    <a:pt x="1453075" y="3161891"/>
-                  </a:lnTo>
-                  <a:lnTo>
-                    <a:pt x="1524698" y="3185896"/>
-                  </a:lnTo>
-                  <a:lnTo>
-                    <a:pt x="1596320" y="3208111"/>
-                  </a:lnTo>
-                  <a:lnTo>
-                    <a:pt x="1667943" y="3228668"/>
-                  </a:lnTo>
-                  <a:lnTo>
-                    <a:pt x="1739565" y="3247693"/>
-                  </a:lnTo>
-                  <a:lnTo>
-                    <a:pt x="1811188" y="3265298"/>
-                  </a:lnTo>
-                  <a:lnTo>
-                    <a:pt x="1882810" y="3281591"/>
-                  </a:lnTo>
-                  <a:lnTo>
-                    <a:pt x="1954433" y="3296668"/>
-                  </a:lnTo>
-                  <a:lnTo>
-                    <a:pt x="2026055" y="3310621"/>
-                  </a:lnTo>
-                  <a:lnTo>
-                    <a:pt x="2097678" y="3323533"/>
-                  </a:lnTo>
-                  <a:lnTo>
-                    <a:pt x="2169300" y="3335482"/>
-                  </a:lnTo>
-                  <a:lnTo>
-                    <a:pt x="2240923" y="3346540"/>
-                  </a:lnTo>
-                  <a:lnTo>
-                    <a:pt x="2312545" y="3356773"/>
-                  </a:lnTo>
-                  <a:lnTo>
-                    <a:pt x="2384168" y="3366243"/>
-                  </a:lnTo>
-                  <a:lnTo>
-                    <a:pt x="2455790" y="3375007"/>
-                  </a:lnTo>
-                  <a:lnTo>
-                    <a:pt x="2527413" y="3383117"/>
-                  </a:lnTo>
-                  <a:lnTo>
-                    <a:pt x="2599035" y="3390622"/>
-                  </a:lnTo>
-                  <a:lnTo>
-                    <a:pt x="2670658" y="3397568"/>
-                  </a:lnTo>
-                  <a:lnTo>
-                    <a:pt x="2742281" y="3403995"/>
-                  </a:lnTo>
-                  <a:lnTo>
-                    <a:pt x="2813903" y="3409943"/>
-                  </a:lnTo>
-                  <a:lnTo>
-                    <a:pt x="2885526" y="3415448"/>
-                  </a:lnTo>
-                  <a:lnTo>
-                    <a:pt x="2957148" y="3420542"/>
-                  </a:lnTo>
-                  <a:lnTo>
-                    <a:pt x="3028771" y="3425256"/>
-                  </a:lnTo>
-                  <a:lnTo>
-                    <a:pt x="3100393" y="3429618"/>
-                  </a:lnTo>
-                  <a:lnTo>
-                    <a:pt x="3172016" y="3433655"/>
-                  </a:lnTo>
-                  <a:lnTo>
-                    <a:pt x="3243638" y="3437391"/>
-                  </a:lnTo>
-                  <a:lnTo>
-                    <a:pt x="3315261" y="3440848"/>
-                  </a:lnTo>
-                  <a:lnTo>
-                    <a:pt x="3386883" y="3444048"/>
-                  </a:lnTo>
-                  <a:lnTo>
-                    <a:pt x="3458506" y="3447009"/>
-                  </a:lnTo>
-                  <a:lnTo>
-                    <a:pt x="3530128" y="3449749"/>
-                  </a:lnTo>
-                  <a:lnTo>
-                    <a:pt x="3601751" y="3452284"/>
-                  </a:lnTo>
-                  <a:lnTo>
-                    <a:pt x="3673373" y="3454631"/>
-                  </a:lnTo>
-                  <a:lnTo>
-                    <a:pt x="3744996" y="3456802"/>
-                  </a:lnTo>
-                  <a:lnTo>
-                    <a:pt x="3816618" y="3458812"/>
-                  </a:lnTo>
-                  <a:lnTo>
-                    <a:pt x="3888241" y="3460672"/>
-                  </a:lnTo>
-                  <a:lnTo>
-                    <a:pt x="3959863" y="3462393"/>
-                  </a:lnTo>
-                  <a:lnTo>
-                    <a:pt x="4031486" y="3463985"/>
-                  </a:lnTo>
-                  <a:lnTo>
-                    <a:pt x="4103109" y="3465459"/>
-                  </a:lnTo>
-                  <a:lnTo>
-                    <a:pt x="4174731" y="3466823"/>
-                  </a:lnTo>
-                  <a:lnTo>
-                    <a:pt x="4246354" y="3468085"/>
-                  </a:lnTo>
-                  <a:lnTo>
-                    <a:pt x="4317976" y="3469253"/>
-                  </a:lnTo>
-                  <a:lnTo>
-                    <a:pt x="4389599" y="3470334"/>
-                  </a:lnTo>
-                  <a:lnTo>
-                    <a:pt x="4461221" y="3471334"/>
-                  </a:lnTo>
-                  <a:lnTo>
-                    <a:pt x="4532844" y="3472260"/>
-                  </a:lnTo>
-                  <a:lnTo>
-                    <a:pt x="4604466" y="3473117"/>
-                  </a:lnTo>
-                  <a:lnTo>
-                    <a:pt x="4676089" y="3473910"/>
+                    <a:pt x="13308" y="121748"/>
+                  </a:lnTo>
+                  <a:lnTo>
+                    <a:pt x="84930" y="670099"/>
+                  </a:lnTo>
+                  <a:lnTo>
+                    <a:pt x="156553" y="1129012"/>
+                  </a:lnTo>
+                  <a:lnTo>
+                    <a:pt x="228175" y="1513076"/>
+                  </a:lnTo>
+                  <a:lnTo>
+                    <a:pt x="299798" y="1834498"/>
+                  </a:lnTo>
+                  <a:lnTo>
+                    <a:pt x="371421" y="2103495"/>
+                  </a:lnTo>
+                  <a:lnTo>
+                    <a:pt x="443043" y="2328617"/>
+                  </a:lnTo>
+                  <a:lnTo>
+                    <a:pt x="514666" y="2517022"/>
+                  </a:lnTo>
+                  <a:lnTo>
+                    <a:pt x="586288" y="2663217"/>
+                  </a:lnTo>
+                  <a:lnTo>
+                    <a:pt x="657911" y="2724314"/>
+                  </a:lnTo>
+                  <a:lnTo>
+                    <a:pt x="729533" y="2780861"/>
+                  </a:lnTo>
+                  <a:lnTo>
+                    <a:pt x="801156" y="2833198"/>
+                  </a:lnTo>
+                  <a:lnTo>
+                    <a:pt x="872778" y="2881638"/>
+                  </a:lnTo>
+                  <a:lnTo>
+                    <a:pt x="944401" y="2926471"/>
+                  </a:lnTo>
+                  <a:lnTo>
+                    <a:pt x="1016023" y="2967966"/>
+                  </a:lnTo>
+                  <a:lnTo>
+                    <a:pt x="1087646" y="3006371"/>
+                  </a:lnTo>
+                  <a:lnTo>
+                    <a:pt x="1159268" y="3041916"/>
+                  </a:lnTo>
+                  <a:lnTo>
+                    <a:pt x="1230891" y="3074815"/>
+                  </a:lnTo>
+                  <a:lnTo>
+                    <a:pt x="1302513" y="3105264"/>
+                  </a:lnTo>
+                  <a:lnTo>
+                    <a:pt x="1374136" y="3133446"/>
+                  </a:lnTo>
+                  <a:lnTo>
+                    <a:pt x="1445758" y="3159529"/>
+                  </a:lnTo>
+                  <a:lnTo>
+                    <a:pt x="1517381" y="3183670"/>
+                  </a:lnTo>
+                  <a:lnTo>
+                    <a:pt x="1589003" y="3206014"/>
+                  </a:lnTo>
+                  <a:lnTo>
+                    <a:pt x="1660626" y="3226694"/>
+                  </a:lnTo>
+                  <a:lnTo>
+                    <a:pt x="1732249" y="3245834"/>
+                  </a:lnTo>
+                  <a:lnTo>
+                    <a:pt x="1803871" y="3263549"/>
+                  </a:lnTo>
+                  <a:lnTo>
+                    <a:pt x="1875494" y="3279945"/>
+                  </a:lnTo>
+                  <a:lnTo>
+                    <a:pt x="1947116" y="3295120"/>
+                  </a:lnTo>
+                  <a:lnTo>
+                    <a:pt x="2018739" y="3309165"/>
+                  </a:lnTo>
+                  <a:lnTo>
+                    <a:pt x="2090361" y="3322164"/>
+                  </a:lnTo>
+                  <a:lnTo>
+                    <a:pt x="2161984" y="3334196"/>
+                  </a:lnTo>
+                  <a:lnTo>
+                    <a:pt x="2233606" y="3345331"/>
+                  </a:lnTo>
+                  <a:lnTo>
+                    <a:pt x="2305229" y="3355638"/>
+                  </a:lnTo>
+                  <a:lnTo>
+                    <a:pt x="2376851" y="3365177"/>
+                  </a:lnTo>
+                  <a:lnTo>
+                    <a:pt x="2448474" y="3374005"/>
+                  </a:lnTo>
+                  <a:lnTo>
+                    <a:pt x="2520096" y="3382177"/>
+                  </a:lnTo>
+                  <a:lnTo>
+                    <a:pt x="2591719" y="3389740"/>
+                  </a:lnTo>
+                  <a:lnTo>
+                    <a:pt x="2663341" y="3396739"/>
+                  </a:lnTo>
+                  <a:lnTo>
+                    <a:pt x="2734964" y="3403218"/>
+                  </a:lnTo>
+                  <a:lnTo>
+                    <a:pt x="2806586" y="3409214"/>
+                  </a:lnTo>
+                  <a:lnTo>
+                    <a:pt x="2878209" y="3414764"/>
+                  </a:lnTo>
+                  <a:lnTo>
+                    <a:pt x="2949831" y="3419900"/>
+                  </a:lnTo>
+                  <a:lnTo>
+                    <a:pt x="3021454" y="3424654"/>
+                  </a:lnTo>
+                  <a:lnTo>
+                    <a:pt x="3093077" y="3429054"/>
+                  </a:lnTo>
+                  <a:lnTo>
+                    <a:pt x="3164699" y="3433127"/>
+                  </a:lnTo>
+                  <a:lnTo>
+                    <a:pt x="3236322" y="3436896"/>
+                  </a:lnTo>
+                  <a:lnTo>
+                    <a:pt x="3307944" y="3440384"/>
+                  </a:lnTo>
+                  <a:lnTo>
+                    <a:pt x="3379567" y="3443613"/>
+                  </a:lnTo>
+                  <a:lnTo>
+                    <a:pt x="3451189" y="3446601"/>
+                  </a:lnTo>
+                  <a:lnTo>
+                    <a:pt x="3522812" y="3449367"/>
+                  </a:lnTo>
+                  <a:lnTo>
+                    <a:pt x="3594434" y="3451927"/>
+                  </a:lnTo>
+                  <a:lnTo>
+                    <a:pt x="3666057" y="3454296"/>
+                  </a:lnTo>
+                  <a:lnTo>
+                    <a:pt x="3737679" y="3456489"/>
+                  </a:lnTo>
+                  <a:lnTo>
+                    <a:pt x="3809302" y="3458519"/>
+                  </a:lnTo>
+                  <a:lnTo>
+                    <a:pt x="3880924" y="3460397"/>
+                  </a:lnTo>
+                  <a:lnTo>
+                    <a:pt x="3952547" y="3462136"/>
+                  </a:lnTo>
+                  <a:lnTo>
+                    <a:pt x="4024169" y="3463745"/>
+                  </a:lnTo>
+                  <a:lnTo>
+                    <a:pt x="4095792" y="3465234"/>
+                  </a:lnTo>
+                  <a:lnTo>
+                    <a:pt x="4167414" y="3466613"/>
+                  </a:lnTo>
+                  <a:lnTo>
+                    <a:pt x="4239037" y="3467888"/>
+                  </a:lnTo>
+                  <a:lnTo>
+                    <a:pt x="4310659" y="3469069"/>
+                  </a:lnTo>
+                  <a:lnTo>
+                    <a:pt x="4382282" y="3470162"/>
+                  </a:lnTo>
+                  <a:lnTo>
+                    <a:pt x="4453905" y="3471174"/>
+                  </a:lnTo>
+                  <a:lnTo>
+                    <a:pt x="4525527" y="3472110"/>
+                  </a:lnTo>
+                  <a:lnTo>
+                    <a:pt x="4597150" y="3472976"/>
+                  </a:lnTo>
+                  <a:lnTo>
+                    <a:pt x="4668772" y="3473778"/>
                   </a:lnTo>
                 </a:path>
               </a:pathLst>
@@ -4078,240 +4078,240 @@
           </p:nvSpPr>
           <p:spPr>
             <a:xfrm>
-              <a:off x="2839383" y="2073503"/>
-              <a:ext cx="5423296" cy="3483714"/>
+              <a:off x="2842429" y="2073503"/>
+              <a:ext cx="5420250" cy="3483715"/>
             </a:xfrm>
             <a:custGeom>
               <a:avLst/>
               <a:pathLst>
-                <a:path w="5423296" h="3483714">
+                <a:path w="5420250" h="3483715">
                   <a:moveTo>
-                    <a:pt x="5423296" y="3483714"/>
+                    <a:pt x="5420250" y="3483715"/>
                   </a:moveTo>
                   <a:lnTo>
-                    <a:pt x="5351673" y="3483708"/>
-                  </a:lnTo>
-                  <a:lnTo>
-                    <a:pt x="5280051" y="3483700"/>
-                  </a:lnTo>
-                  <a:lnTo>
-                    <a:pt x="5208428" y="3483691"/>
-                  </a:lnTo>
-                  <a:lnTo>
-                    <a:pt x="5136806" y="3483680"/>
-                  </a:lnTo>
-                  <a:lnTo>
-                    <a:pt x="5065183" y="3483667"/>
-                  </a:lnTo>
-                  <a:lnTo>
-                    <a:pt x="4993561" y="3483652"/>
-                  </a:lnTo>
-                  <a:lnTo>
-                    <a:pt x="4921938" y="3483634"/>
-                  </a:lnTo>
-                  <a:lnTo>
-                    <a:pt x="4850316" y="3483612"/>
-                  </a:lnTo>
-                  <a:lnTo>
-                    <a:pt x="4778693" y="3483586"/>
-                  </a:lnTo>
-                  <a:lnTo>
-                    <a:pt x="4707071" y="3483555"/>
-                  </a:lnTo>
-                  <a:lnTo>
-                    <a:pt x="4635448" y="3483517"/>
-                  </a:lnTo>
-                  <a:lnTo>
-                    <a:pt x="4563826" y="3483473"/>
-                  </a:lnTo>
-                  <a:lnTo>
-                    <a:pt x="4492203" y="3483420"/>
-                  </a:lnTo>
-                  <a:lnTo>
-                    <a:pt x="4420581" y="3483357"/>
-                  </a:lnTo>
-                  <a:lnTo>
-                    <a:pt x="4348958" y="3483281"/>
-                  </a:lnTo>
-                  <a:lnTo>
-                    <a:pt x="4277335" y="3483191"/>
-                  </a:lnTo>
-                  <a:lnTo>
-                    <a:pt x="4205713" y="3483083"/>
-                  </a:lnTo>
-                  <a:lnTo>
-                    <a:pt x="4134090" y="3482954"/>
-                  </a:lnTo>
-                  <a:lnTo>
-                    <a:pt x="4062468" y="3482800"/>
-                  </a:lnTo>
-                  <a:lnTo>
-                    <a:pt x="3990845" y="3482617"/>
-                  </a:lnTo>
-                  <a:lnTo>
-                    <a:pt x="3919223" y="3482398"/>
-                  </a:lnTo>
-                  <a:lnTo>
-                    <a:pt x="3847600" y="3482136"/>
-                  </a:lnTo>
-                  <a:lnTo>
-                    <a:pt x="3775978" y="3481823"/>
-                  </a:lnTo>
-                  <a:lnTo>
-                    <a:pt x="3704355" y="3481450"/>
-                  </a:lnTo>
-                  <a:lnTo>
-                    <a:pt x="3632733" y="3481005"/>
-                  </a:lnTo>
-                  <a:lnTo>
-                    <a:pt x="3561110" y="3480473"/>
-                  </a:lnTo>
-                  <a:lnTo>
-                    <a:pt x="3489488" y="3479838"/>
-                  </a:lnTo>
-                  <a:lnTo>
-                    <a:pt x="3417865" y="3479079"/>
-                  </a:lnTo>
-                  <a:lnTo>
-                    <a:pt x="3346243" y="3478174"/>
-                  </a:lnTo>
-                  <a:lnTo>
-                    <a:pt x="3274620" y="3477093"/>
-                  </a:lnTo>
-                  <a:lnTo>
-                    <a:pt x="3202998" y="3475802"/>
-                  </a:lnTo>
-                  <a:lnTo>
-                    <a:pt x="3131375" y="3474260"/>
-                  </a:lnTo>
-                  <a:lnTo>
-                    <a:pt x="3059753" y="3472420"/>
-                  </a:lnTo>
-                  <a:lnTo>
-                    <a:pt x="2988130" y="3470222"/>
-                  </a:lnTo>
-                  <a:lnTo>
-                    <a:pt x="2916507" y="3467598"/>
-                  </a:lnTo>
-                  <a:lnTo>
-                    <a:pt x="2844885" y="3464465"/>
-                  </a:lnTo>
-                  <a:lnTo>
-                    <a:pt x="2773262" y="3460724"/>
-                  </a:lnTo>
-                  <a:lnTo>
-                    <a:pt x="2701640" y="3456258"/>
-                  </a:lnTo>
-                  <a:lnTo>
-                    <a:pt x="2630017" y="3450924"/>
-                  </a:lnTo>
-                  <a:lnTo>
-                    <a:pt x="2558395" y="3444556"/>
-                  </a:lnTo>
-                  <a:lnTo>
-                    <a:pt x="2486772" y="3436953"/>
-                  </a:lnTo>
-                  <a:lnTo>
-                    <a:pt x="2415150" y="3427874"/>
-                  </a:lnTo>
-                  <a:lnTo>
-                    <a:pt x="2343527" y="3417034"/>
-                  </a:lnTo>
-                  <a:lnTo>
-                    <a:pt x="2271905" y="3404091"/>
-                  </a:lnTo>
-                  <a:lnTo>
-                    <a:pt x="2200282" y="3388636"/>
-                  </a:lnTo>
-                  <a:lnTo>
-                    <a:pt x="2128660" y="3370183"/>
-                  </a:lnTo>
-                  <a:lnTo>
-                    <a:pt x="2057037" y="3348150"/>
-                  </a:lnTo>
-                  <a:lnTo>
-                    <a:pt x="1985415" y="3321842"/>
-                  </a:lnTo>
-                  <a:lnTo>
-                    <a:pt x="1913792" y="3290430"/>
-                  </a:lnTo>
-                  <a:lnTo>
-                    <a:pt x="1842170" y="3252923"/>
-                  </a:lnTo>
-                  <a:lnTo>
-                    <a:pt x="1770547" y="3208140"/>
-                  </a:lnTo>
-                  <a:lnTo>
-                    <a:pt x="1698925" y="3154667"/>
-                  </a:lnTo>
-                  <a:lnTo>
-                    <a:pt x="1627302" y="3090820"/>
-                  </a:lnTo>
-                  <a:lnTo>
-                    <a:pt x="1555679" y="3014586"/>
-                  </a:lnTo>
-                  <a:lnTo>
-                    <a:pt x="1484057" y="2923561"/>
-                  </a:lnTo>
-                  <a:lnTo>
-                    <a:pt x="1412434" y="2814876"/>
-                  </a:lnTo>
-                  <a:lnTo>
-                    <a:pt x="1340812" y="2685104"/>
-                  </a:lnTo>
-                  <a:lnTo>
-                    <a:pt x="1269189" y="2602147"/>
-                  </a:lnTo>
-                  <a:lnTo>
-                    <a:pt x="1197567" y="2531096"/>
-                  </a:lnTo>
-                  <a:lnTo>
-                    <a:pt x="1125944" y="2454318"/>
-                  </a:lnTo>
-                  <a:lnTo>
-                    <a:pt x="1054322" y="2371353"/>
-                  </a:lnTo>
-                  <a:lnTo>
-                    <a:pt x="982699" y="2281701"/>
-                  </a:lnTo>
-                  <a:lnTo>
-                    <a:pt x="911077" y="2184824"/>
-                  </a:lnTo>
-                  <a:lnTo>
-                    <a:pt x="839454" y="2080139"/>
-                  </a:lnTo>
-                  <a:lnTo>
-                    <a:pt x="767832" y="1967017"/>
-                  </a:lnTo>
-                  <a:lnTo>
-                    <a:pt x="696209" y="1844779"/>
-                  </a:lnTo>
-                  <a:lnTo>
-                    <a:pt x="624587" y="1712688"/>
-                  </a:lnTo>
-                  <a:lnTo>
-                    <a:pt x="552964" y="1569953"/>
-                  </a:lnTo>
-                  <a:lnTo>
-                    <a:pt x="481342" y="1415713"/>
-                  </a:lnTo>
-                  <a:lnTo>
-                    <a:pt x="409719" y="1249043"/>
-                  </a:lnTo>
-                  <a:lnTo>
-                    <a:pt x="338097" y="1068940"/>
-                  </a:lnTo>
-                  <a:lnTo>
-                    <a:pt x="266474" y="874322"/>
-                  </a:lnTo>
-                  <a:lnTo>
-                    <a:pt x="194851" y="664019"/>
-                  </a:lnTo>
-                  <a:lnTo>
-                    <a:pt x="123229" y="436768"/>
-                  </a:lnTo>
-                  <a:lnTo>
-                    <a:pt x="51606" y="191201"/>
+                    <a:pt x="5348627" y="3483709"/>
+                  </a:lnTo>
+                  <a:lnTo>
+                    <a:pt x="5277005" y="3483701"/>
+                  </a:lnTo>
+                  <a:lnTo>
+                    <a:pt x="5205382" y="3483692"/>
+                  </a:lnTo>
+                  <a:lnTo>
+                    <a:pt x="5133760" y="3483682"/>
+                  </a:lnTo>
+                  <a:lnTo>
+                    <a:pt x="5062137" y="3483669"/>
+                  </a:lnTo>
+                  <a:lnTo>
+                    <a:pt x="4990515" y="3483654"/>
+                  </a:lnTo>
+                  <a:lnTo>
+                    <a:pt x="4918892" y="3483636"/>
+                  </a:lnTo>
+                  <a:lnTo>
+                    <a:pt x="4847270" y="3483615"/>
+                  </a:lnTo>
+                  <a:lnTo>
+                    <a:pt x="4775647" y="3483589"/>
+                  </a:lnTo>
+                  <a:lnTo>
+                    <a:pt x="4704025" y="3483559"/>
+                  </a:lnTo>
+                  <a:lnTo>
+                    <a:pt x="4632402" y="3483522"/>
+                  </a:lnTo>
+                  <a:lnTo>
+                    <a:pt x="4560780" y="3483478"/>
+                  </a:lnTo>
+                  <a:lnTo>
+                    <a:pt x="4489157" y="3483426"/>
+                  </a:lnTo>
+                  <a:lnTo>
+                    <a:pt x="4417535" y="3483364"/>
+                  </a:lnTo>
+                  <a:lnTo>
+                    <a:pt x="4345912" y="3483289"/>
+                  </a:lnTo>
+                  <a:lnTo>
+                    <a:pt x="4274289" y="3483200"/>
+                  </a:lnTo>
+                  <a:lnTo>
+                    <a:pt x="4202667" y="3483093"/>
+                  </a:lnTo>
+                  <a:lnTo>
+                    <a:pt x="4131044" y="3482966"/>
+                  </a:lnTo>
+                  <a:lnTo>
+                    <a:pt x="4059422" y="3482814"/>
+                  </a:lnTo>
+                  <a:lnTo>
+                    <a:pt x="3987799" y="3482633"/>
+                  </a:lnTo>
+                  <a:lnTo>
+                    <a:pt x="3916177" y="3482415"/>
+                  </a:lnTo>
+                  <a:lnTo>
+                    <a:pt x="3844554" y="3482156"/>
+                  </a:lnTo>
+                  <a:lnTo>
+                    <a:pt x="3772932" y="3481846"/>
+                  </a:lnTo>
+                  <a:lnTo>
+                    <a:pt x="3701309" y="3481476"/>
+                  </a:lnTo>
+                  <a:lnTo>
+                    <a:pt x="3629687" y="3481033"/>
+                  </a:lnTo>
+                  <a:lnTo>
+                    <a:pt x="3558064" y="3480504"/>
+                  </a:lnTo>
+                  <a:lnTo>
+                    <a:pt x="3486442" y="3479873"/>
+                  </a:lnTo>
+                  <a:lnTo>
+                    <a:pt x="3414819" y="3479118"/>
+                  </a:lnTo>
+                  <a:lnTo>
+                    <a:pt x="3343197" y="3478216"/>
+                  </a:lnTo>
+                  <a:lnTo>
+                    <a:pt x="3271574" y="3477138"/>
+                  </a:lnTo>
+                  <a:lnTo>
+                    <a:pt x="3199952" y="3475850"/>
+                  </a:lnTo>
+                  <a:lnTo>
+                    <a:pt x="3128329" y="3474311"/>
+                  </a:lnTo>
+                  <a:lnTo>
+                    <a:pt x="3056707" y="3472472"/>
+                  </a:lnTo>
+                  <a:lnTo>
+                    <a:pt x="2985084" y="3470274"/>
+                  </a:lnTo>
+                  <a:lnTo>
+                    <a:pt x="2913461" y="3467649"/>
+                  </a:lnTo>
+                  <a:lnTo>
+                    <a:pt x="2841839" y="3464512"/>
+                  </a:lnTo>
+                  <a:lnTo>
+                    <a:pt x="2770216" y="3460763"/>
+                  </a:lnTo>
+                  <a:lnTo>
+                    <a:pt x="2698594" y="3456284"/>
+                  </a:lnTo>
+                  <a:lnTo>
+                    <a:pt x="2626971" y="3450931"/>
+                  </a:lnTo>
+                  <a:lnTo>
+                    <a:pt x="2555349" y="3444536"/>
+                  </a:lnTo>
+                  <a:lnTo>
+                    <a:pt x="2483726" y="3436894"/>
+                  </a:lnTo>
+                  <a:lnTo>
+                    <a:pt x="2412104" y="3427763"/>
+                  </a:lnTo>
+                  <a:lnTo>
+                    <a:pt x="2340481" y="3416853"/>
+                  </a:lnTo>
+                  <a:lnTo>
+                    <a:pt x="2268859" y="3403816"/>
+                  </a:lnTo>
+                  <a:lnTo>
+                    <a:pt x="2197236" y="3388238"/>
+                  </a:lnTo>
+                  <a:lnTo>
+                    <a:pt x="2125614" y="3369625"/>
+                  </a:lnTo>
+                  <a:lnTo>
+                    <a:pt x="2053991" y="3347383"/>
+                  </a:lnTo>
+                  <a:lnTo>
+                    <a:pt x="1982369" y="3320808"/>
+                  </a:lnTo>
+                  <a:lnTo>
+                    <a:pt x="1910746" y="3289053"/>
+                  </a:lnTo>
+                  <a:lnTo>
+                    <a:pt x="1839124" y="3251109"/>
+                  </a:lnTo>
+                  <a:lnTo>
+                    <a:pt x="1767501" y="3205770"/>
+                  </a:lnTo>
+                  <a:lnTo>
+                    <a:pt x="1695879" y="3151595"/>
+                  </a:lnTo>
+                  <a:lnTo>
+                    <a:pt x="1624256" y="3086863"/>
+                  </a:lnTo>
+                  <a:lnTo>
+                    <a:pt x="1552633" y="3009514"/>
+                  </a:lnTo>
+                  <a:lnTo>
+                    <a:pt x="1481011" y="2917091"/>
+                  </a:lnTo>
+                  <a:lnTo>
+                    <a:pt x="1409388" y="2806656"/>
+                  </a:lnTo>
+                  <a:lnTo>
+                    <a:pt x="1337766" y="2674698"/>
+                  </a:lnTo>
+                  <a:lnTo>
+                    <a:pt x="1266143" y="2597205"/>
+                  </a:lnTo>
+                  <a:lnTo>
+                    <a:pt x="1194521" y="2525883"/>
+                  </a:lnTo>
+                  <a:lnTo>
+                    <a:pt x="1122898" y="2448822"/>
+                  </a:lnTo>
+                  <a:lnTo>
+                    <a:pt x="1051276" y="2365562"/>
+                  </a:lnTo>
+                  <a:lnTo>
+                    <a:pt x="979653" y="2275604"/>
+                  </a:lnTo>
+                  <a:lnTo>
+                    <a:pt x="908031" y="2178408"/>
+                  </a:lnTo>
+                  <a:lnTo>
+                    <a:pt x="836408" y="2073393"/>
+                  </a:lnTo>
+                  <a:lnTo>
+                    <a:pt x="764786" y="1959930"/>
+                  </a:lnTo>
+                  <a:lnTo>
+                    <a:pt x="693163" y="1837338"/>
+                  </a:lnTo>
+                  <a:lnTo>
+                    <a:pt x="621541" y="1704884"/>
+                  </a:lnTo>
+                  <a:lnTo>
+                    <a:pt x="549918" y="1561774"/>
+                  </a:lnTo>
+                  <a:lnTo>
+                    <a:pt x="478296" y="1407151"/>
+                  </a:lnTo>
+                  <a:lnTo>
+                    <a:pt x="406673" y="1240088"/>
+                  </a:lnTo>
+                  <a:lnTo>
+                    <a:pt x="335051" y="1059584"/>
+                  </a:lnTo>
+                  <a:lnTo>
+                    <a:pt x="263428" y="864560"/>
+                  </a:lnTo>
+                  <a:lnTo>
+                    <a:pt x="191805" y="653845"/>
+                  </a:lnTo>
+                  <a:lnTo>
+                    <a:pt x="120183" y="426178"/>
+                  </a:lnTo>
+                  <a:lnTo>
+                    <a:pt x="48560" y="180196"/>
                   </a:lnTo>
                   <a:lnTo>
                     <a:pt x="0" y="0"/>
@@ -4334,222 +4334,222 @@
           </p:nvSpPr>
           <p:spPr>
             <a:xfrm>
-              <a:off x="3359359" y="2073503"/>
-              <a:ext cx="4903320" cy="3483180"/>
+              <a:off x="3366450" y="2073503"/>
+              <a:ext cx="4896229" cy="3483185"/>
             </a:xfrm>
             <a:custGeom>
               <a:avLst/>
               <a:pathLst>
-                <a:path w="4903320" h="3483180">
+                <a:path w="4896229" h="3483185">
                   <a:moveTo>
                     <a:pt x="0" y="0"/>
                   </a:moveTo>
                   <a:lnTo>
-                    <a:pt x="32988" y="205202"/>
-                  </a:lnTo>
-                  <a:lnTo>
-                    <a:pt x="104610" y="597425"/>
-                  </a:lnTo>
-                  <a:lnTo>
-                    <a:pt x="176233" y="942725"/>
-                  </a:lnTo>
-                  <a:lnTo>
-                    <a:pt x="247856" y="1246716"/>
-                  </a:lnTo>
-                  <a:lnTo>
-                    <a:pt x="319478" y="1514339"/>
-                  </a:lnTo>
-                  <a:lnTo>
-                    <a:pt x="391101" y="1749946"/>
-                  </a:lnTo>
-                  <a:lnTo>
-                    <a:pt x="462723" y="1957366"/>
-                  </a:lnTo>
-                  <a:lnTo>
-                    <a:pt x="534346" y="2139972"/>
-                  </a:lnTo>
-                  <a:lnTo>
-                    <a:pt x="605968" y="2300732"/>
-                  </a:lnTo>
-                  <a:lnTo>
-                    <a:pt x="677591" y="2442260"/>
-                  </a:lnTo>
-                  <a:lnTo>
-                    <a:pt x="749213" y="2566857"/>
-                  </a:lnTo>
-                  <a:lnTo>
-                    <a:pt x="820836" y="2676547"/>
-                  </a:lnTo>
-                  <a:lnTo>
-                    <a:pt x="892458" y="2773115"/>
-                  </a:lnTo>
-                  <a:lnTo>
-                    <a:pt x="964081" y="2858130"/>
-                  </a:lnTo>
-                  <a:lnTo>
-                    <a:pt x="1035703" y="2932975"/>
-                  </a:lnTo>
-                  <a:lnTo>
-                    <a:pt x="1107326" y="2998865"/>
-                  </a:lnTo>
-                  <a:lnTo>
-                    <a:pt x="1178948" y="3056873"/>
-                  </a:lnTo>
-                  <a:lnTo>
-                    <a:pt x="1250571" y="3107942"/>
-                  </a:lnTo>
-                  <a:lnTo>
-                    <a:pt x="1322193" y="3152900"/>
-                  </a:lnTo>
-                  <a:lnTo>
-                    <a:pt x="1393816" y="3192481"/>
-                  </a:lnTo>
-                  <a:lnTo>
-                    <a:pt x="1465438" y="3227326"/>
-                  </a:lnTo>
-                  <a:lnTo>
-                    <a:pt x="1537061" y="3258002"/>
-                  </a:lnTo>
-                  <a:lnTo>
-                    <a:pt x="1608684" y="3285009"/>
-                  </a:lnTo>
-                  <a:lnTo>
-                    <a:pt x="1680306" y="3308784"/>
-                  </a:lnTo>
-                  <a:lnTo>
-                    <a:pt x="1751929" y="3329716"/>
-                  </a:lnTo>
-                  <a:lnTo>
-                    <a:pt x="1823551" y="3348143"/>
-                  </a:lnTo>
-                  <a:lnTo>
-                    <a:pt x="1895174" y="3364366"/>
-                  </a:lnTo>
-                  <a:lnTo>
-                    <a:pt x="1966796" y="3378647"/>
-                  </a:lnTo>
-                  <a:lnTo>
-                    <a:pt x="2038419" y="3391221"/>
-                  </a:lnTo>
-                  <a:lnTo>
-                    <a:pt x="2110041" y="3402290"/>
-                  </a:lnTo>
-                  <a:lnTo>
-                    <a:pt x="2181664" y="3412035"/>
-                  </a:lnTo>
-                  <a:lnTo>
-                    <a:pt x="2253286" y="3420614"/>
-                  </a:lnTo>
-                  <a:lnTo>
-                    <a:pt x="2324909" y="3428167"/>
-                  </a:lnTo>
-                  <a:lnTo>
-                    <a:pt x="2396531" y="3434816"/>
-                  </a:lnTo>
-                  <a:lnTo>
-                    <a:pt x="2468154" y="3440670"/>
-                  </a:lnTo>
-                  <a:lnTo>
-                    <a:pt x="2539776" y="3445823"/>
-                  </a:lnTo>
-                  <a:lnTo>
-                    <a:pt x="2611399" y="3450360"/>
-                  </a:lnTo>
-                  <a:lnTo>
-                    <a:pt x="2683021" y="3454354"/>
-                  </a:lnTo>
-                  <a:lnTo>
-                    <a:pt x="2754644" y="3457870"/>
-                  </a:lnTo>
-                  <a:lnTo>
-                    <a:pt x="2826266" y="3460966"/>
-                  </a:lnTo>
-                  <a:lnTo>
-                    <a:pt x="2897889" y="3463691"/>
-                  </a:lnTo>
-                  <a:lnTo>
-                    <a:pt x="2969512" y="3466091"/>
-                  </a:lnTo>
-                  <a:lnTo>
-                    <a:pt x="3041134" y="3468203"/>
-                  </a:lnTo>
-                  <a:lnTo>
-                    <a:pt x="3112757" y="3470062"/>
-                  </a:lnTo>
-                  <a:lnTo>
-                    <a:pt x="3184379" y="3471699"/>
-                  </a:lnTo>
-                  <a:lnTo>
-                    <a:pt x="3256002" y="3473141"/>
-                  </a:lnTo>
-                  <a:lnTo>
-                    <a:pt x="3327624" y="3474409"/>
-                  </a:lnTo>
-                  <a:lnTo>
-                    <a:pt x="3399247" y="3475526"/>
-                  </a:lnTo>
-                  <a:lnTo>
-                    <a:pt x="3470869" y="3476510"/>
-                  </a:lnTo>
-                  <a:lnTo>
-                    <a:pt x="3542492" y="3477376"/>
-                  </a:lnTo>
-                  <a:lnTo>
-                    <a:pt x="3614114" y="3478138"/>
-                  </a:lnTo>
-                  <a:lnTo>
-                    <a:pt x="3685737" y="3478809"/>
-                  </a:lnTo>
-                  <a:lnTo>
-                    <a:pt x="3757359" y="3479399"/>
-                  </a:lnTo>
-                  <a:lnTo>
-                    <a:pt x="3828982" y="3479919"/>
-                  </a:lnTo>
-                  <a:lnTo>
-                    <a:pt x="3900604" y="3480377"/>
-                  </a:lnTo>
-                  <a:lnTo>
-                    <a:pt x="3972227" y="3480780"/>
-                  </a:lnTo>
-                  <a:lnTo>
-                    <a:pt x="4043849" y="3481135"/>
-                  </a:lnTo>
-                  <a:lnTo>
-                    <a:pt x="4115472" y="3481448"/>
-                  </a:lnTo>
-                  <a:lnTo>
-                    <a:pt x="4187094" y="3481723"/>
-                  </a:lnTo>
-                  <a:lnTo>
-                    <a:pt x="4258717" y="3481965"/>
-                  </a:lnTo>
-                  <a:lnTo>
-                    <a:pt x="4330340" y="3482178"/>
-                  </a:lnTo>
-                  <a:lnTo>
-                    <a:pt x="4401962" y="3482366"/>
-                  </a:lnTo>
-                  <a:lnTo>
-                    <a:pt x="4473585" y="3482531"/>
-                  </a:lnTo>
-                  <a:lnTo>
-                    <a:pt x="4545207" y="3482676"/>
-                  </a:lnTo>
-                  <a:lnTo>
-                    <a:pt x="4616830" y="3482804"/>
-                  </a:lnTo>
-                  <a:lnTo>
-                    <a:pt x="4688452" y="3482917"/>
-                  </a:lnTo>
-                  <a:lnTo>
-                    <a:pt x="4760075" y="3483016"/>
-                  </a:lnTo>
-                  <a:lnTo>
-                    <a:pt x="4831697" y="3483104"/>
-                  </a:lnTo>
-                  <a:lnTo>
-                    <a:pt x="4903320" y="3483180"/>
+                    <a:pt x="25897" y="163547"/>
+                  </a:lnTo>
+                  <a:lnTo>
+                    <a:pt x="97519" y="561628"/>
+                  </a:lnTo>
+                  <a:lnTo>
+                    <a:pt x="169142" y="911980"/>
+                  </a:lnTo>
+                  <a:lnTo>
+                    <a:pt x="240765" y="1220327"/>
+                  </a:lnTo>
+                  <a:lnTo>
+                    <a:pt x="312387" y="1491703"/>
+                  </a:lnTo>
+                  <a:lnTo>
+                    <a:pt x="384010" y="1730542"/>
+                  </a:lnTo>
+                  <a:lnTo>
+                    <a:pt x="455632" y="1940746"/>
+                  </a:lnTo>
+                  <a:lnTo>
+                    <a:pt x="527255" y="2125746"/>
+                  </a:lnTo>
+                  <a:lnTo>
+                    <a:pt x="598877" y="2288566"/>
+                  </a:lnTo>
+                  <a:lnTo>
+                    <a:pt x="670500" y="2431864"/>
+                  </a:lnTo>
+                  <a:lnTo>
+                    <a:pt x="742122" y="2557981"/>
+                  </a:lnTo>
+                  <a:lnTo>
+                    <a:pt x="813745" y="2668978"/>
+                  </a:lnTo>
+                  <a:lnTo>
+                    <a:pt x="885367" y="2766666"/>
+                  </a:lnTo>
+                  <a:lnTo>
+                    <a:pt x="956990" y="2852641"/>
+                  </a:lnTo>
+                  <a:lnTo>
+                    <a:pt x="1028612" y="2928309"/>
+                  </a:lnTo>
+                  <a:lnTo>
+                    <a:pt x="1100235" y="2994904"/>
+                  </a:lnTo>
+                  <a:lnTo>
+                    <a:pt x="1171857" y="3053514"/>
+                  </a:lnTo>
+                  <a:lnTo>
+                    <a:pt x="1243480" y="3105098"/>
+                  </a:lnTo>
+                  <a:lnTo>
+                    <a:pt x="1315102" y="3150496"/>
+                  </a:lnTo>
+                  <a:lnTo>
+                    <a:pt x="1386725" y="3190452"/>
+                  </a:lnTo>
+                  <a:lnTo>
+                    <a:pt x="1458347" y="3225617"/>
+                  </a:lnTo>
+                  <a:lnTo>
+                    <a:pt x="1529970" y="3256566"/>
+                  </a:lnTo>
+                  <a:lnTo>
+                    <a:pt x="1601593" y="3283804"/>
+                  </a:lnTo>
+                  <a:lnTo>
+                    <a:pt x="1673215" y="3307777"/>
+                  </a:lnTo>
+                  <a:lnTo>
+                    <a:pt x="1744838" y="3328875"/>
+                  </a:lnTo>
+                  <a:lnTo>
+                    <a:pt x="1816460" y="3347443"/>
+                  </a:lnTo>
+                  <a:lnTo>
+                    <a:pt x="1888083" y="3363786"/>
+                  </a:lnTo>
+                  <a:lnTo>
+                    <a:pt x="1959705" y="3378169"/>
+                  </a:lnTo>
+                  <a:lnTo>
+                    <a:pt x="2031328" y="3390827"/>
+                  </a:lnTo>
+                  <a:lnTo>
+                    <a:pt x="2102950" y="3401968"/>
+                  </a:lnTo>
+                  <a:lnTo>
+                    <a:pt x="2174573" y="3411773"/>
+                  </a:lnTo>
+                  <a:lnTo>
+                    <a:pt x="2246195" y="3420402"/>
+                  </a:lnTo>
+                  <a:lnTo>
+                    <a:pt x="2317818" y="3427997"/>
+                  </a:lnTo>
+                  <a:lnTo>
+                    <a:pt x="2389440" y="3434681"/>
+                  </a:lnTo>
+                  <a:lnTo>
+                    <a:pt x="2461063" y="3440564"/>
+                  </a:lnTo>
+                  <a:lnTo>
+                    <a:pt x="2532685" y="3445741"/>
+                  </a:lnTo>
+                  <a:lnTo>
+                    <a:pt x="2604308" y="3450298"/>
+                  </a:lnTo>
+                  <a:lnTo>
+                    <a:pt x="2675930" y="3454308"/>
+                  </a:lnTo>
+                  <a:lnTo>
+                    <a:pt x="2747553" y="3457838"/>
+                  </a:lnTo>
+                  <a:lnTo>
+                    <a:pt x="2819175" y="3460944"/>
+                  </a:lnTo>
+                  <a:lnTo>
+                    <a:pt x="2890798" y="3463678"/>
+                  </a:lnTo>
+                  <a:lnTo>
+                    <a:pt x="2962421" y="3466084"/>
+                  </a:lnTo>
+                  <a:lnTo>
+                    <a:pt x="3034043" y="3468202"/>
+                  </a:lnTo>
+                  <a:lnTo>
+                    <a:pt x="3105666" y="3470066"/>
+                  </a:lnTo>
+                  <a:lnTo>
+                    <a:pt x="3177288" y="3471706"/>
+                  </a:lnTo>
+                  <a:lnTo>
+                    <a:pt x="3248911" y="3473150"/>
+                  </a:lnTo>
+                  <a:lnTo>
+                    <a:pt x="3320533" y="3474420"/>
+                  </a:lnTo>
+                  <a:lnTo>
+                    <a:pt x="3392156" y="3475538"/>
+                  </a:lnTo>
+                  <a:lnTo>
+                    <a:pt x="3463778" y="3476522"/>
+                  </a:lnTo>
+                  <a:lnTo>
+                    <a:pt x="3535401" y="3477389"/>
+                  </a:lnTo>
+                  <a:lnTo>
+                    <a:pt x="3607023" y="3478151"/>
+                  </a:lnTo>
+                  <a:lnTo>
+                    <a:pt x="3678646" y="3478822"/>
+                  </a:lnTo>
+                  <a:lnTo>
+                    <a:pt x="3750268" y="3479412"/>
+                  </a:lnTo>
+                  <a:lnTo>
+                    <a:pt x="3821891" y="3479932"/>
+                  </a:lnTo>
+                  <a:lnTo>
+                    <a:pt x="3893513" y="3480389"/>
+                  </a:lnTo>
+                  <a:lnTo>
+                    <a:pt x="3965136" y="3480792"/>
+                  </a:lnTo>
+                  <a:lnTo>
+                    <a:pt x="4036758" y="3481146"/>
+                  </a:lnTo>
+                  <a:lnTo>
+                    <a:pt x="4108381" y="3481458"/>
+                  </a:lnTo>
+                  <a:lnTo>
+                    <a:pt x="4180003" y="3481732"/>
+                  </a:lnTo>
+                  <a:lnTo>
+                    <a:pt x="4251626" y="3481974"/>
+                  </a:lnTo>
+                  <a:lnTo>
+                    <a:pt x="4323249" y="3482186"/>
+                  </a:lnTo>
+                  <a:lnTo>
+                    <a:pt x="4394871" y="3482373"/>
+                  </a:lnTo>
+                  <a:lnTo>
+                    <a:pt x="4466494" y="3482538"/>
+                  </a:lnTo>
+                  <a:lnTo>
+                    <a:pt x="4538116" y="3482683"/>
+                  </a:lnTo>
+                  <a:lnTo>
+                    <a:pt x="4609739" y="3482810"/>
+                  </a:lnTo>
+                  <a:lnTo>
+                    <a:pt x="4681361" y="3482923"/>
+                  </a:lnTo>
+                  <a:lnTo>
+                    <a:pt x="4752984" y="3483021"/>
+                  </a:lnTo>
+                  <a:lnTo>
+                    <a:pt x="4824606" y="3483108"/>
+                  </a:lnTo>
+                  <a:lnTo>
+                    <a:pt x="4896229" y="3483185"/>
                   </a:lnTo>
                 </a:path>
               </a:pathLst>
@@ -4621,7 +4621,7 @@
           </p:nvSpPr>
           <p:spPr>
             <a:xfrm>
-              <a:off x="4164901" y="2073503"/>
+              <a:off x="4170171" y="2073503"/>
               <a:ext cx="0" cy="3649639"/>
             </a:xfrm>
             <a:custGeom>
@@ -4894,7 +4894,7 @@
           </p:nvSpPr>
           <p:spPr>
             <a:xfrm>
-              <a:off x="1382692" y="5785772"/>
+              <a:off x="1383511" y="5785772"/>
               <a:ext cx="161574" cy="80101"/>
             </a:xfrm>
             <a:prstGeom prst="rect">
@@ -4940,7 +4940,7 @@
           </p:nvSpPr>
           <p:spPr>
             <a:xfrm>
-              <a:off x="2284877" y="5785772"/>
+              <a:off x="2285456" y="5785772"/>
               <a:ext cx="161574" cy="80101"/>
             </a:xfrm>
             <a:prstGeom prst="rect">
@@ -4986,7 +4986,7 @@
           </p:nvSpPr>
           <p:spPr>
             <a:xfrm>
-              <a:off x="3187061" y="5785772"/>
+              <a:off x="3187401" y="5785772"/>
               <a:ext cx="161574" cy="80101"/>
             </a:xfrm>
             <a:prstGeom prst="rect">
@@ -5032,7 +5032,7 @@
           </p:nvSpPr>
           <p:spPr>
             <a:xfrm>
-              <a:off x="4138944" y="5785772"/>
+              <a:off x="4139043" y="5785772"/>
               <a:ext cx="62179" cy="80101"/>
             </a:xfrm>
             <a:prstGeom prst="rect">
@@ -5078,7 +5078,7 @@
           </p:nvSpPr>
           <p:spPr>
             <a:xfrm>
-              <a:off x="5010039" y="5785772"/>
+              <a:off x="5009898" y="5785772"/>
               <a:ext cx="124358" cy="80101"/>
             </a:xfrm>
             <a:prstGeom prst="rect">
@@ -5124,7 +5124,7 @@
           </p:nvSpPr>
           <p:spPr>
             <a:xfrm>
-              <a:off x="5912223" y="5785772"/>
+              <a:off x="5911843" y="5785772"/>
               <a:ext cx="124358" cy="80101"/>
             </a:xfrm>
             <a:prstGeom prst="rect">
@@ -5170,7 +5170,7 @@
           </p:nvSpPr>
           <p:spPr>
             <a:xfrm>
-              <a:off x="6814408" y="5785772"/>
+              <a:off x="6813788" y="5785772"/>
               <a:ext cx="124358" cy="80101"/>
             </a:xfrm>
             <a:prstGeom prst="rect">
@@ -5216,7 +5216,7 @@
           </p:nvSpPr>
           <p:spPr>
             <a:xfrm>
-              <a:off x="7716592" y="5785772"/>
+              <a:off x="7715733" y="5785772"/>
               <a:ext cx="124358" cy="80101"/>
             </a:xfrm>
             <a:prstGeom prst="rect">
@@ -5387,7 +5387,7 @@
                   <a:latin typeface="Helvetica"/>
                   <a:cs typeface="Helvetica"/>
                 </a:rPr>
-                <a:t>subHR per 10 % decline: 4.98 (2.65-9.33), p = &lt;0.001  |  per IQR decline (Δ = 27.4 %): 81.88 (14.58-459.72)  |  IQR: [-12.6, 14.8] %</a:t>
+                <a:t>subHR per 10 % decline: 4.99 (2.65-9.41), p = &lt;0.001  |  per IQR decline (Δ = 27.2 %): 79.63 (14.18-447.05)  |  IQR: [-12.3, 14.9] %</a:t>
               </a:r>
             </a:p>
           </p:txBody>
